--- a/lectures/lec4_threads.pptx
+++ b/lectures/lec4_threads.pptx
@@ -243,7 +243,7 @@
             <a:fld id="{3B85FA19-4AE7-394C-8E06-B4A0FB3E5AA8}" type="datetimeFigureOut">
               <a:rPr lang="en-US" smtClean="0"/>
               <a:pPr/>
-              <a:t>9/13/24</a:t>
+              <a:t>1/21/26</a:t>
             </a:fld>
             <a:endParaRPr lang="en-US"/>
           </a:p>
@@ -411,7 +411,7 @@
             <a:fld id="{FD6991A4-6061-8E40-B3BF-9224535D7C20}" type="datetimeFigureOut">
               <a:rPr lang="en-US" smtClean="0"/>
               <a:pPr/>
-              <a:t>9/13/24</a:t>
+              <a:t>1/21/26</a:t>
             </a:fld>
             <a:endParaRPr lang="en-US"/>
           </a:p>
@@ -6384,6 +6384,27 @@
               <a:rPr lang="en-US" dirty="0"/>
               <a:t>Creating a new process is costly because of all the data structures that must be allocated and initialized</a:t>
             </a:r>
+            <a:r>
+              <a:rPr lang="zh-CN" altLang="en-US" dirty="0"/>
+              <a:t> </a:t>
+            </a:r>
+            <a:r>
+              <a:rPr lang="en-US" altLang="zh-CN" dirty="0"/>
+              <a:t>(~</a:t>
+            </a:r>
+            <a:r>
+              <a:rPr lang="en-US" altLang="zh-CN" dirty="0">
+                <a:solidFill>
+                  <a:srgbClr val="FF0000"/>
+                </a:solidFill>
+              </a:rPr>
+              <a:t>10ms</a:t>
+            </a:r>
+            <a:r>
+              <a:rPr lang="en-US" altLang="zh-CN" dirty="0"/>
+              <a:t>)</a:t>
+            </a:r>
+            <a:endParaRPr lang="en-US" dirty="0"/>
           </a:p>
           <a:p>
             <a:pPr lvl="1"/>
@@ -10589,7 +10610,7 @@
             <a:pPr latinLnBrk="0"/>
             <a:r>
               <a:rPr lang="en-US" dirty="0"/>
-              <a:t>Modern OSes (Windows, modern Unix) separate the concepts of processes and threads</a:t>
+              <a:t>Modern OSes separate the concepts of processes and threads</a:t>
             </a:r>
           </a:p>
           <a:p>
@@ -10640,7 +10661,7 @@
             <a:pPr lvl="1"/>
             <a:r>
               <a:rPr lang="en-US" dirty="0"/>
-              <a:t>Processes, however, can have </a:t>
+              <a:t>Processes can have </a:t>
             </a:r>
             <a:r>
               <a:rPr lang="en-US" dirty="0">
@@ -10648,11 +10669,11 @@
                   <a:srgbClr val="FF0000"/>
                 </a:solidFill>
               </a:rPr>
-              <a:t>multiple </a:t>
-            </a:r>
-            <a:r>
-              <a:rPr lang="en-US" dirty="0"/>
-              <a:t>threads</a:t>
+              <a:t>many </a:t>
+            </a:r>
+            <a:r>
+              <a:rPr lang="en-US" dirty="0"/>
+              <a:t>threads, yeah~</a:t>
             </a:r>
           </a:p>
           <a:p>
@@ -12795,7 +12816,19 @@
           <a:p>
             <a:r>
               <a:rPr lang="en-US" dirty="0"/>
-              <a:t>Using fork() to create new processes to handle requests in parallel is an overkill for such a simple task</a:t>
+              <a:t>Using fork() to create new processes to handle requests in parallel is an </a:t>
+            </a:r>
+            <a:r>
+              <a:rPr lang="en-US" dirty="0">
+                <a:solidFill>
+                  <a:srgbClr val="FF0000"/>
+                </a:solidFill>
+              </a:rPr>
+              <a:t>overkill</a:t>
+            </a:r>
+            <a:r>
+              <a:rPr lang="en-US" dirty="0"/>
+              <a:t> for such a simple task</a:t>
             </a:r>
           </a:p>
           <a:p>
